--- a/public/phil-210/powerpoint_pdfs/(REL 210 World Religions) Ch. 12 Islam.pptx
+++ b/public/phil-210/powerpoint_pdfs/(REL 210 World Religions) Ch. 12 Islam.pptx
@@ -246,7 +246,7 @@
           <a:p>
             <a:fld id="{4A746934-BE4B-40E8-A78F-5DE804D03023}" type="datetimeFigureOut">
               <a:rPr lang="en-US" smtClean="0"/>
-              <a:t>12/2/2025</a:t>
+              <a:t>4/19/2026</a:t>
             </a:fld>
             <a:endParaRPr lang="en-US"/>
           </a:p>
@@ -3530,7 +3530,7 @@
             <a:fld id="{8E36636D-D922-432D-A958-524484B5923D}" type="datetimeFigureOut">
               <a:rPr lang="en-US" dirty="0"/>
               <a:pPr/>
-              <a:t>12/2/2025</a:t>
+              <a:t>4/19/2026</a:t>
             </a:fld>
             <a:endParaRPr lang="en-US" dirty="0"/>
           </a:p>
@@ -3824,7 +3824,7 @@
           <a:p>
             <a:fld id="{48A87A34-81AB-432B-8DAE-1953F412C126}" type="datetimeFigureOut">
               <a:rPr lang="en-US" dirty="0"/>
-              <a:t>12/2/2025</a:t>
+              <a:t>4/19/2026</a:t>
             </a:fld>
             <a:endParaRPr lang="en-US" dirty="0"/>
           </a:p>
@@ -4011,7 +4011,7 @@
           <a:p>
             <a:fld id="{48A87A34-81AB-432B-8DAE-1953F412C126}" type="datetimeFigureOut">
               <a:rPr lang="en-US" dirty="0"/>
-              <a:t>12/2/2025</a:t>
+              <a:t>4/19/2026</a:t>
             </a:fld>
             <a:endParaRPr lang="en-US" dirty="0"/>
           </a:p>
@@ -4267,7 +4267,7 @@
           <a:p>
             <a:fld id="{48A87A34-81AB-432B-8DAE-1953F412C126}" type="datetimeFigureOut">
               <a:rPr lang="en-US" dirty="0"/>
-              <a:t>12/2/2025</a:t>
+              <a:t>4/19/2026</a:t>
             </a:fld>
             <a:endParaRPr lang="en-US" dirty="0"/>
           </a:p>
@@ -4686,7 +4686,7 @@
           <a:p>
             <a:fld id="{48A87A34-81AB-432B-8DAE-1953F412C126}" type="datetimeFigureOut">
               <a:rPr lang="en-US" dirty="0"/>
-              <a:t>12/2/2025</a:t>
+              <a:t>4/19/2026</a:t>
             </a:fld>
             <a:endParaRPr lang="en-US" dirty="0"/>
           </a:p>
@@ -5218,7 +5218,7 @@
           <a:p>
             <a:fld id="{48A87A34-81AB-432B-8DAE-1953F412C126}" type="datetimeFigureOut">
               <a:rPr lang="en-US" dirty="0"/>
-              <a:t>12/2/2025</a:t>
+              <a:t>4/19/2026</a:t>
             </a:fld>
             <a:endParaRPr lang="en-US" dirty="0"/>
           </a:p>
@@ -6077,7 +6077,7 @@
           <a:p>
             <a:fld id="{48A87A34-81AB-432B-8DAE-1953F412C126}" type="datetimeFigureOut">
               <a:rPr lang="en-US" dirty="0"/>
-              <a:t>12/2/2025</a:t>
+              <a:t>4/19/2026</a:t>
             </a:fld>
             <a:endParaRPr lang="en-US" dirty="0"/>
           </a:p>
@@ -6243,7 +6243,7 @@
             <a:fld id="{8E36636D-D922-432D-A958-524484B5923D}" type="datetimeFigureOut">
               <a:rPr lang="en-US" dirty="0"/>
               <a:pPr/>
-              <a:t>12/2/2025</a:t>
+              <a:t>4/19/2026</a:t>
             </a:fld>
             <a:endParaRPr lang="en-US" dirty="0"/>
           </a:p>
@@ -6424,7 +6424,7 @@
             <a:fld id="{8E36636D-D922-432D-A958-524484B5923D}" type="datetimeFigureOut">
               <a:rPr lang="en-US" dirty="0"/>
               <a:pPr/>
-              <a:t>12/2/2025</a:t>
+              <a:t>4/19/2026</a:t>
             </a:fld>
             <a:endParaRPr lang="en-US" dirty="0"/>
           </a:p>
@@ -6591,7 +6591,7 @@
             <a:fld id="{8E36636D-D922-432D-A958-524484B5923D}" type="datetimeFigureOut">
               <a:rPr lang="en-US" dirty="0"/>
               <a:pPr/>
-              <a:t>12/2/2025</a:t>
+              <a:t>4/19/2026</a:t>
             </a:fld>
             <a:endParaRPr lang="en-US" dirty="0"/>
           </a:p>
@@ -6832,7 +6832,7 @@
             <a:fld id="{8E36636D-D922-432D-A958-524484B5923D}" type="datetimeFigureOut">
               <a:rPr lang="en-US" dirty="0"/>
               <a:pPr/>
-              <a:t>12/2/2025</a:t>
+              <a:t>4/19/2026</a:t>
             </a:fld>
             <a:endParaRPr lang="en-US" dirty="0"/>
           </a:p>
@@ -7065,7 +7065,7 @@
             <a:fld id="{8E36636D-D922-432D-A958-524484B5923D}" type="datetimeFigureOut">
               <a:rPr lang="en-US" dirty="0"/>
               <a:pPr/>
-              <a:t>12/2/2025</a:t>
+              <a:t>4/19/2026</a:t>
             </a:fld>
             <a:endParaRPr lang="en-US" dirty="0"/>
           </a:p>
@@ -7528,7 +7528,7 @@
             <a:fld id="{8E36636D-D922-432D-A958-524484B5923D}" type="datetimeFigureOut">
               <a:rPr lang="en-US" dirty="0"/>
               <a:pPr/>
-              <a:t>12/2/2025</a:t>
+              <a:t>4/19/2026</a:t>
             </a:fld>
             <a:endParaRPr lang="en-US" dirty="0"/>
           </a:p>
@@ -7643,7 +7643,7 @@
             <a:fld id="{8E36636D-D922-432D-A958-524484B5923D}" type="datetimeFigureOut">
               <a:rPr lang="en-US" dirty="0"/>
               <a:pPr/>
-              <a:t>12/2/2025</a:t>
+              <a:t>4/19/2026</a:t>
             </a:fld>
             <a:endParaRPr lang="en-US" dirty="0"/>
           </a:p>
@@ -7735,7 +7735,7 @@
             <a:fld id="{8E36636D-D922-432D-A958-524484B5923D}" type="datetimeFigureOut">
               <a:rPr lang="en-US" dirty="0"/>
               <a:pPr/>
-              <a:t>12/2/2025</a:t>
+              <a:t>4/19/2026</a:t>
             </a:fld>
             <a:endParaRPr lang="en-US" dirty="0"/>
           </a:p>
@@ -7987,7 +7987,7 @@
             <a:fld id="{8E36636D-D922-432D-A958-524484B5923D}" type="datetimeFigureOut">
               <a:rPr lang="en-US" dirty="0"/>
               <a:pPr/>
-              <a:t>12/2/2025</a:t>
+              <a:t>4/19/2026</a:t>
             </a:fld>
             <a:endParaRPr lang="en-US" dirty="0"/>
           </a:p>
@@ -8284,7 +8284,7 @@
             <a:fld id="{8E36636D-D922-432D-A958-524484B5923D}" type="datetimeFigureOut">
               <a:rPr lang="en-US" dirty="0"/>
               <a:pPr/>
-              <a:t>12/2/2025</a:t>
+              <a:t>4/19/2026</a:t>
             </a:fld>
             <a:endParaRPr lang="en-US" dirty="0"/>
           </a:p>
@@ -8515,7 +8515,7 @@
             <a:fld id="{8E36636D-D922-432D-A958-524484B5923D}" type="datetimeFigureOut">
               <a:rPr lang="en-US" dirty="0"/>
               <a:pPr/>
-              <a:t>12/2/2025</a:t>
+              <a:t>4/19/2026</a:t>
             </a:fld>
             <a:endParaRPr lang="en-US" dirty="0"/>
           </a:p>
@@ -10166,7 +10166,7 @@
 </file>
 
 <file path=ppt/slides/slide15.xml><?xml version="1.0" encoding="utf-8"?>
-<p:sld xmlns:a="http://schemas.openxmlformats.org/drawingml/2006/main" xmlns:r="http://schemas.openxmlformats.org/officeDocument/2006/relationships" xmlns:p="http://schemas.openxmlformats.org/presentationml/2006/main" show="0">
+<p:sld xmlns:a="http://schemas.openxmlformats.org/drawingml/2006/main" xmlns:r="http://schemas.openxmlformats.org/officeDocument/2006/relationships" xmlns:p="http://schemas.openxmlformats.org/presentationml/2006/main">
   <p:cSld>
     <p:spTree>
       <p:nvGrpSpPr>
@@ -10306,7 +10306,7 @@
 </file>
 
 <file path=ppt/slides/slide16.xml><?xml version="1.0" encoding="utf-8"?>
-<p:sld xmlns:a="http://schemas.openxmlformats.org/drawingml/2006/main" xmlns:r="http://schemas.openxmlformats.org/officeDocument/2006/relationships" xmlns:p="http://schemas.openxmlformats.org/presentationml/2006/main" show="0">
+<p:sld xmlns:a="http://schemas.openxmlformats.org/drawingml/2006/main" xmlns:r="http://schemas.openxmlformats.org/officeDocument/2006/relationships" xmlns:p="http://schemas.openxmlformats.org/presentationml/2006/main">
   <p:cSld>
     <p:spTree>
       <p:nvGrpSpPr>
@@ -10445,7 +10445,7 @@
 </file>
 
 <file path=ppt/slides/slide17.xml><?xml version="1.0" encoding="utf-8"?>
-<p:sld xmlns:a="http://schemas.openxmlformats.org/drawingml/2006/main" xmlns:r="http://schemas.openxmlformats.org/officeDocument/2006/relationships" xmlns:p="http://schemas.openxmlformats.org/presentationml/2006/main" show="0">
+<p:sld xmlns:a="http://schemas.openxmlformats.org/drawingml/2006/main" xmlns:r="http://schemas.openxmlformats.org/officeDocument/2006/relationships" xmlns:p="http://schemas.openxmlformats.org/presentationml/2006/main">
   <p:cSld>
     <p:spTree>
       <p:nvGrpSpPr>
@@ -10588,7 +10588,7 @@
 </file>
 
 <file path=ppt/slides/slide18.xml><?xml version="1.0" encoding="utf-8"?>
-<p:sld xmlns:a="http://schemas.openxmlformats.org/drawingml/2006/main" xmlns:r="http://schemas.openxmlformats.org/officeDocument/2006/relationships" xmlns:p="http://schemas.openxmlformats.org/presentationml/2006/main" show="0">
+<p:sld xmlns:a="http://schemas.openxmlformats.org/drawingml/2006/main" xmlns:r="http://schemas.openxmlformats.org/officeDocument/2006/relationships" xmlns:p="http://schemas.openxmlformats.org/presentationml/2006/main">
   <p:cSld>
     <p:spTree>
       <p:nvGrpSpPr>
@@ -10744,7 +10744,7 @@
 </file>
 
 <file path=ppt/slides/slide19.xml><?xml version="1.0" encoding="utf-8"?>
-<p:sld xmlns:a="http://schemas.openxmlformats.org/drawingml/2006/main" xmlns:r="http://schemas.openxmlformats.org/officeDocument/2006/relationships" xmlns:p="http://schemas.openxmlformats.org/presentationml/2006/main" show="0">
+<p:sld xmlns:a="http://schemas.openxmlformats.org/drawingml/2006/main" xmlns:r="http://schemas.openxmlformats.org/officeDocument/2006/relationships" xmlns:p="http://schemas.openxmlformats.org/presentationml/2006/main">
   <p:cSld>
     <p:spTree>
       <p:nvGrpSpPr>
@@ -10983,7 +10983,7 @@
             </a:r>
             <a:r>
               <a:rPr lang="en-US" dirty="0"/>
-              <a:t> 1 Billion Muslims worldwide, 2</a:t>
+              <a:t> 2.06 Billion Muslims worldwide, 2</a:t>
             </a:r>
             <a:r>
               <a:rPr lang="en-US" baseline="30000" dirty="0"/>
@@ -11037,7 +11037,7 @@
 </file>
 
 <file path=ppt/slides/slide20.xml><?xml version="1.0" encoding="utf-8"?>
-<p:sld xmlns:a="http://schemas.openxmlformats.org/drawingml/2006/main" xmlns:r="http://schemas.openxmlformats.org/officeDocument/2006/relationships" xmlns:p="http://schemas.openxmlformats.org/presentationml/2006/main" show="0">
+<p:sld xmlns:a="http://schemas.openxmlformats.org/drawingml/2006/main" xmlns:r="http://schemas.openxmlformats.org/officeDocument/2006/relationships" xmlns:p="http://schemas.openxmlformats.org/presentationml/2006/main">
   <p:cSld>
     <p:spTree>
       <p:nvGrpSpPr>
@@ -11159,7 +11159,7 @@
 </file>
 
 <file path=ppt/slides/slide21.xml><?xml version="1.0" encoding="utf-8"?>
-<p:sld xmlns:a="http://schemas.openxmlformats.org/drawingml/2006/main" xmlns:r="http://schemas.openxmlformats.org/officeDocument/2006/relationships" xmlns:p="http://schemas.openxmlformats.org/presentationml/2006/main" show="0">
+<p:sld xmlns:a="http://schemas.openxmlformats.org/drawingml/2006/main" xmlns:r="http://schemas.openxmlformats.org/officeDocument/2006/relationships" xmlns:p="http://schemas.openxmlformats.org/presentationml/2006/main">
   <p:cSld>
     <p:spTree>
       <p:nvGrpSpPr>
@@ -11267,7 +11267,7 @@
 </file>
 
 <file path=ppt/slides/slide22.xml><?xml version="1.0" encoding="utf-8"?>
-<p:sld xmlns:a="http://schemas.openxmlformats.org/drawingml/2006/main" xmlns:r="http://schemas.openxmlformats.org/officeDocument/2006/relationships" xmlns:p="http://schemas.openxmlformats.org/presentationml/2006/main" show="0">
+<p:sld xmlns:a="http://schemas.openxmlformats.org/drawingml/2006/main" xmlns:r="http://schemas.openxmlformats.org/officeDocument/2006/relationships" xmlns:p="http://schemas.openxmlformats.org/presentationml/2006/main">
   <p:cSld>
     <p:spTree>
       <p:nvGrpSpPr>
@@ -11326,7 +11326,7 @@
 </file>
 
 <file path=ppt/slides/slide23.xml><?xml version="1.0" encoding="utf-8"?>
-<p:sld xmlns:a="http://schemas.openxmlformats.org/drawingml/2006/main" xmlns:r="http://schemas.openxmlformats.org/officeDocument/2006/relationships" xmlns:p="http://schemas.openxmlformats.org/presentationml/2006/main" show="0">
+<p:sld xmlns:a="http://schemas.openxmlformats.org/drawingml/2006/main" xmlns:r="http://schemas.openxmlformats.org/officeDocument/2006/relationships" xmlns:p="http://schemas.openxmlformats.org/presentationml/2006/main">
   <p:cSld>
     <p:spTree>
       <p:nvGrpSpPr>
@@ -11447,7 +11447,7 @@
 </file>
 
 <file path=ppt/slides/slide24.xml><?xml version="1.0" encoding="utf-8"?>
-<p:sld xmlns:a="http://schemas.openxmlformats.org/drawingml/2006/main" xmlns:r="http://schemas.openxmlformats.org/officeDocument/2006/relationships" xmlns:p="http://schemas.openxmlformats.org/presentationml/2006/main" show="0">
+<p:sld xmlns:a="http://schemas.openxmlformats.org/drawingml/2006/main" xmlns:r="http://schemas.openxmlformats.org/officeDocument/2006/relationships" xmlns:p="http://schemas.openxmlformats.org/presentationml/2006/main">
   <p:cSld>
     <p:spTree>
       <p:nvGrpSpPr>
@@ -11609,7 +11609,7 @@
 </file>
 
 <file path=ppt/slides/slide25.xml><?xml version="1.0" encoding="utf-8"?>
-<p:sld xmlns:a="http://schemas.openxmlformats.org/drawingml/2006/main" xmlns:r="http://schemas.openxmlformats.org/officeDocument/2006/relationships" xmlns:p="http://schemas.openxmlformats.org/presentationml/2006/main" show="0">
+<p:sld xmlns:a="http://schemas.openxmlformats.org/drawingml/2006/main" xmlns:r="http://schemas.openxmlformats.org/officeDocument/2006/relationships" xmlns:p="http://schemas.openxmlformats.org/presentationml/2006/main">
   <p:cSld>
     <p:spTree>
       <p:nvGrpSpPr>
@@ -11740,7 +11740,7 @@
 </file>
 
 <file path=ppt/slides/slide26.xml><?xml version="1.0" encoding="utf-8"?>
-<p:sld xmlns:a="http://schemas.openxmlformats.org/drawingml/2006/main" xmlns:r="http://schemas.openxmlformats.org/officeDocument/2006/relationships" xmlns:p="http://schemas.openxmlformats.org/presentationml/2006/main" show="0">
+<p:sld xmlns:a="http://schemas.openxmlformats.org/drawingml/2006/main" xmlns:r="http://schemas.openxmlformats.org/officeDocument/2006/relationships" xmlns:p="http://schemas.openxmlformats.org/presentationml/2006/main">
   <p:cSld>
     <p:spTree>
       <p:nvGrpSpPr>
@@ -12217,7 +12217,12 @@
             <p:ph idx="1"/>
           </p:nvPr>
         </p:nvSpPr>
-        <p:spPr/>
+        <p:spPr>
+          <a:xfrm>
+            <a:off x="913190" y="1802788"/>
+            <a:ext cx="10353762" cy="4058751"/>
+          </a:xfrm>
+        </p:spPr>
         <p:txBody>
           <a:bodyPr/>
           <a:lstStyle/>
